--- a/Документы/Презентация_NCFU_Events.pptx
+++ b/Документы/Презентация_NCFU_Events.pptx
@@ -17,6 +17,10 @@
     <p:sldId id="265" r:id="rId15"/>
     <p:sldId id="266" r:id="rId16"/>
     <p:sldId id="267" r:id="rId17"/>
+    <p:sldId id="268" r:id="rId18"/>
+    <p:sldId id="269" r:id="rId19"/>
+    <p:sldId id="270" r:id="rId20"/>
+    <p:sldId id="271" r:id="rId21"/>
   </p:sldIdLst>
   <p:sldSz cx="12192000" cy="6858000"/>
   <p:notesSz cx="6858000" cy="9144000"/>
@@ -3083,951 +3087,6 @@
           <a:lstStyle/>
           <a:p>
             <a:r>
-              <a:t>Бот MAX и уведомления</a:t>
-            </a:r>
-          </a:p>
-        </p:txBody>
-      </p:sp>
-      <p:sp>
-        <p:nvSpPr>
-          <p:cNvPr id="3" name="Content Placeholder 2"/>
-          <p:cNvSpPr>
-            <a:spLocks noGrp="1"/>
-          </p:cNvSpPr>
-          <p:nvPr>
-            <p:ph idx="1"/>
-          </p:nvPr>
-        </p:nvSpPr>
-        <p:spPr/>
-        <p:txBody>
-          <a:bodyPr wrap="square"/>
-          <a:lstStyle/>
-          <a:p>
-            <a:pPr>
-              <a:defRPr sz="1600"/>
-            </a:pPr>
-            <a:r>
-              <a:t>Команды:</a:t>
-            </a:r>
-          </a:p>
-          <a:p>
-            <a:pPr lvl="1">
-              <a:defRPr sz="1600"/>
-            </a:pPr>
-            <a:r>
-              <a:t>  /start — приветствие</a:t>
-            </a:r>
-          </a:p>
-          <a:p>
-            <a:pPr lvl="1">
-              <a:defRPr sz="1600"/>
-            </a:pPr>
-            <a:r>
-              <a:t>  /events — предстоящие мероприятия</a:t>
-            </a:r>
-          </a:p>
-          <a:p>
-            <a:pPr>
-              <a:defRPr sz="1600"/>
-            </a:pPr>
-          </a:p>
-          <a:p>
-            <a:pPr>
-              <a:defRPr sz="1600"/>
-            </a:pPr>
-            <a:r>
-              <a:t>Cron-уведомления:</a:t>
-            </a:r>
-          </a:p>
-          <a:p>
-            <a:pPr lvl="1">
-              <a:defRPr sz="1600"/>
-            </a:pPr>
-            <a:r>
-              <a:t>  7:00 МСК — утреннее напоминание</a:t>
-            </a:r>
-          </a:p>
-          <a:p>
-            <a:pPr lvl="1">
-              <a:defRPr sz="1600"/>
-            </a:pPr>
-            <a:r>
-              <a:t>  За 30 минут — напоминание перед началом</a:t>
-            </a:r>
-          </a:p>
-          <a:p>
-            <a:pPr>
-              <a:defRPr sz="1600"/>
-            </a:pPr>
-          </a:p>
-          <a:p>
-            <a:pPr>
-              <a:defRPr sz="1600"/>
-            </a:pPr>
-            <a:r>
-              <a:t>Мгновенное уведомление при обновлении</a:t>
-            </a:r>
-          </a:p>
-          <a:p>
-            <a:pPr>
-              <a:defRPr sz="1600"/>
-            </a:pPr>
-            <a:r>
-              <a:t>Настройка вкл/выкл в профиле</a:t>
-            </a:r>
-          </a:p>
-        </p:txBody>
-      </p:sp>
-    </p:spTree>
-  </p:cSld>
-  <p:clrMapOvr>
-    <a:masterClrMapping/>
-  </p:clrMapOvr>
-</p:sld>
-</file>
-
-<file path=ppt/slides/slide11.xml><?xml version="1.0" encoding="utf-8"?>
-<p:sld xmlns:a="http://schemas.openxmlformats.org/drawingml/2006/main" xmlns:p="http://schemas.openxmlformats.org/presentationml/2006/main" xmlns:r="http://schemas.openxmlformats.org/officeDocument/2006/relationships">
-  <p:cSld>
-    <p:spTree>
-      <p:nvGrpSpPr>
-        <p:cNvPr id="1" name=""/>
-        <p:cNvGrpSpPr/>
-        <p:nvPr/>
-      </p:nvGrpSpPr>
-      <p:grpSpPr/>
-      <p:sp>
-        <p:nvSpPr>
-          <p:cNvPr id="2" name="Title 1"/>
-          <p:cNvSpPr>
-            <a:spLocks noGrp="1"/>
-          </p:cNvSpPr>
-          <p:nvPr>
-            <p:ph type="title"/>
-          </p:nvPr>
-        </p:nvSpPr>
-        <p:spPr/>
-        <p:txBody>
-          <a:bodyPr/>
-          <a:lstStyle/>
-          <a:p>
-            <a:r>
-              <a:t>Безопасность</a:t>
-            </a:r>
-          </a:p>
-        </p:txBody>
-      </p:sp>
-      <p:sp>
-        <p:nvSpPr>
-          <p:cNvPr id="3" name="Content Placeholder 2"/>
-          <p:cNvSpPr>
-            <a:spLocks noGrp="1"/>
-          </p:cNvSpPr>
-          <p:nvPr>
-            <p:ph idx="1"/>
-          </p:nvPr>
-        </p:nvSpPr>
-        <p:spPr/>
-        <p:txBody>
-          <a:bodyPr wrap="square"/>
-          <a:lstStyle/>
-          <a:p>
-            <a:pPr>
-              <a:defRPr sz="1600"/>
-            </a:pPr>
-            <a:r>
-              <a:t>Авторизация через InitData мессенджера MAX</a:t>
-            </a:r>
-          </a:p>
-          <a:p>
-            <a:pPr>
-              <a:defRPr sz="1600"/>
-            </a:pPr>
-            <a:r>
-              <a:t>Валидация подписи HMAC-SHA256</a:t>
-            </a:r>
-          </a:p>
-          <a:p>
-            <a:pPr>
-              <a:defRPr sz="1600"/>
-            </a:pPr>
-            <a:r>
-              <a:t>Ролевой контроль доступа (RBAC)</a:t>
-            </a:r>
-          </a:p>
-          <a:p>
-            <a:pPr>
-              <a:defRPr sz="1600"/>
-            </a:pPr>
-            <a:r>
-              <a:t>Валидация данных через Zod</a:t>
-            </a:r>
-          </a:p>
-          <a:p>
-            <a:pPr>
-              <a:defRPr sz="1600"/>
-            </a:pPr>
-            <a:r>
-              <a:t>CORS + Helmet + Rate Limiting</a:t>
-            </a:r>
-          </a:p>
-        </p:txBody>
-      </p:sp>
-    </p:spTree>
-  </p:cSld>
-  <p:clrMapOvr>
-    <a:masterClrMapping/>
-  </p:clrMapOvr>
-</p:sld>
-</file>
-
-<file path=ppt/slides/slide12.xml><?xml version="1.0" encoding="utf-8"?>
-<p:sld xmlns:a="http://schemas.openxmlformats.org/drawingml/2006/main" xmlns:p="http://schemas.openxmlformats.org/presentationml/2006/main" xmlns:r="http://schemas.openxmlformats.org/officeDocument/2006/relationships">
-  <p:cSld>
-    <p:spTree>
-      <p:nvGrpSpPr>
-        <p:cNvPr id="1" name=""/>
-        <p:cNvGrpSpPr/>
-        <p:nvPr/>
-      </p:nvGrpSpPr>
-      <p:grpSpPr/>
-      <p:sp>
-        <p:nvSpPr>
-          <p:cNvPr id="2" name="Title 1"/>
-          <p:cNvSpPr>
-            <a:spLocks noGrp="1"/>
-          </p:cNvSpPr>
-          <p:nvPr>
-            <p:ph type="title"/>
-          </p:nvPr>
-        </p:nvSpPr>
-        <p:spPr/>
-        <p:txBody>
-          <a:bodyPr/>
-          <a:lstStyle/>
-          <a:p>
-            <a:r>
-              <a:t>Итоги</a:t>
-            </a:r>
-          </a:p>
-        </p:txBody>
-      </p:sp>
-      <p:sp>
-        <p:nvSpPr>
-          <p:cNvPr id="3" name="Content Placeholder 2"/>
-          <p:cNvSpPr>
-            <a:spLocks noGrp="1"/>
-          </p:cNvSpPr>
-          <p:nvPr>
-            <p:ph idx="1"/>
-          </p:nvPr>
-        </p:nvSpPr>
-        <p:spPr/>
-        <p:txBody>
-          <a:bodyPr wrap="square"/>
-          <a:lstStyle/>
-          <a:p>
-            <a:pPr>
-              <a:defRPr sz="1600"/>
-            </a:pPr>
-            <a:r>
-              <a:t>✅ Полный цикл: регистрация → посещение</a:t>
-            </a:r>
-          </a:p>
-          <a:p>
-            <a:pPr>
-              <a:defRPr sz="1600"/>
-            </a:pPr>
-            <a:r>
-              <a:t>✅ Три роли с отдельными интерфейсами</a:t>
-            </a:r>
-          </a:p>
-          <a:p>
-            <a:pPr>
-              <a:defRPr sz="1600"/>
-            </a:pPr>
-            <a:r>
-              <a:t>✅ QR-коды для регистрации и посещаемости</a:t>
-            </a:r>
-          </a:p>
-          <a:p>
-            <a:pPr>
-              <a:defRPr sz="1600"/>
-            </a:pPr>
-            <a:r>
-              <a:t>✅ Бот с уведомлениями по расписанию</a:t>
-            </a:r>
-          </a:p>
-          <a:p>
-            <a:pPr>
-              <a:defRPr sz="1600"/>
-            </a:pPr>
-            <a:r>
-              <a:t>✅ Аналитика и отчёты</a:t>
-            </a:r>
-          </a:p>
-          <a:p>
-            <a:pPr>
-              <a:defRPr sz="1600"/>
-            </a:pPr>
-            <a:r>
-              <a:t>✅ Docker-деплой + документация</a:t>
-            </a:r>
-          </a:p>
-          <a:p>
-            <a:pPr>
-              <a:defRPr sz="1600"/>
-            </a:pPr>
-          </a:p>
-          <a:p>
-            <a:pPr>
-              <a:defRPr sz="1600"/>
-            </a:pPr>
-            <a:r>
-              <a:t>Спасибо за внимание!</a:t>
-            </a:r>
-          </a:p>
-        </p:txBody>
-      </p:sp>
-    </p:spTree>
-  </p:cSld>
-  <p:clrMapOvr>
-    <a:masterClrMapping/>
-  </p:clrMapOvr>
-</p:sld>
-</file>
-
-<file path=ppt/slides/slide2.xml><?xml version="1.0" encoding="utf-8"?>
-<p:sld xmlns:a="http://schemas.openxmlformats.org/drawingml/2006/main" xmlns:p="http://schemas.openxmlformats.org/presentationml/2006/main" xmlns:r="http://schemas.openxmlformats.org/officeDocument/2006/relationships">
-  <p:cSld>
-    <p:spTree>
-      <p:nvGrpSpPr>
-        <p:cNvPr id="1" name=""/>
-        <p:cNvGrpSpPr/>
-        <p:nvPr/>
-      </p:nvGrpSpPr>
-      <p:grpSpPr/>
-      <p:sp>
-        <p:nvSpPr>
-          <p:cNvPr id="2" name="Title 1"/>
-          <p:cNvSpPr>
-            <a:spLocks noGrp="1"/>
-          </p:cNvSpPr>
-          <p:nvPr>
-            <p:ph type="title"/>
-          </p:nvPr>
-        </p:nvSpPr>
-        <p:spPr/>
-        <p:txBody>
-          <a:bodyPr/>
-          <a:lstStyle/>
-          <a:p>
-            <a:r>
-              <a:t>Команда «Фермеры»</a:t>
-            </a:r>
-          </a:p>
-        </p:txBody>
-      </p:sp>
-      <p:sp>
-        <p:nvSpPr>
-          <p:cNvPr id="3" name="Content Placeholder 2"/>
-          <p:cNvSpPr>
-            <a:spLocks noGrp="1"/>
-          </p:cNvSpPr>
-          <p:nvPr>
-            <p:ph idx="1"/>
-          </p:nvPr>
-        </p:nvSpPr>
-        <p:spPr/>
-        <p:txBody>
-          <a:bodyPr wrap="square"/>
-          <a:lstStyle/>
-          <a:p>
-            <a:pPr>
-              <a:defRPr sz="1600"/>
-            </a:pPr>
-            <a:r>
-              <a:t>Мангушев Максим Андреевич — капитан</a:t>
-            </a:r>
-          </a:p>
-          <a:p>
-            <a:pPr lvl="1">
-              <a:defRPr sz="1600"/>
-            </a:pPr>
-            <a:r>
-              <a:t>Группа: н-ИСТ-б-о-23-1</a:t>
-            </a:r>
-          </a:p>
-          <a:p>
-            <a:pPr>
-              <a:defRPr sz="1600"/>
-            </a:pPr>
-          </a:p>
-          <a:p>
-            <a:pPr>
-              <a:defRPr sz="1600"/>
-            </a:pPr>
-            <a:r>
-              <a:t>Усачёв Богдан Максимович — участник</a:t>
-            </a:r>
-          </a:p>
-          <a:p>
-            <a:pPr lvl="1">
-              <a:defRPr sz="1600"/>
-            </a:pPr>
-            <a:r>
-              <a:t>Группа: н-ИСТ-б-о-23-1</a:t>
-            </a:r>
-          </a:p>
-          <a:p>
-            <a:pPr>
-              <a:defRPr sz="1600"/>
-            </a:pPr>
-          </a:p>
-          <a:p>
-            <a:pPr>
-              <a:defRPr sz="1600"/>
-            </a:pPr>
-            <a:r>
-              <a:t>Сосенко Валентин Евгеньевич — участник</a:t>
-            </a:r>
-          </a:p>
-          <a:p>
-            <a:pPr lvl="1">
-              <a:defRPr sz="1600"/>
-            </a:pPr>
-            <a:r>
-              <a:t>Группа: н-ИСТ-б-о-23-1</a:t>
-            </a:r>
-          </a:p>
-        </p:txBody>
-      </p:sp>
-    </p:spTree>
-  </p:cSld>
-  <p:clrMapOvr>
-    <a:masterClrMapping/>
-  </p:clrMapOvr>
-</p:sld>
-</file>
-
-<file path=ppt/slides/slide3.xml><?xml version="1.0" encoding="utf-8"?>
-<p:sld xmlns:a="http://schemas.openxmlformats.org/drawingml/2006/main" xmlns:p="http://schemas.openxmlformats.org/presentationml/2006/main" xmlns:r="http://schemas.openxmlformats.org/officeDocument/2006/relationships">
-  <p:cSld>
-    <p:spTree>
-      <p:nvGrpSpPr>
-        <p:cNvPr id="1" name=""/>
-        <p:cNvGrpSpPr/>
-        <p:nvPr/>
-      </p:nvGrpSpPr>
-      <p:grpSpPr/>
-      <p:sp>
-        <p:nvSpPr>
-          <p:cNvPr id="2" name="Title 1"/>
-          <p:cNvSpPr>
-            <a:spLocks noGrp="1"/>
-          </p:cNvSpPr>
-          <p:nvPr>
-            <p:ph type="title"/>
-          </p:nvPr>
-        </p:nvSpPr>
-        <p:spPr/>
-        <p:txBody>
-          <a:bodyPr/>
-          <a:lstStyle/>
-          <a:p>
-            <a:r>
-              <a:t>Проблема</a:t>
-            </a:r>
-          </a:p>
-        </p:txBody>
-      </p:sp>
-      <p:sp>
-        <p:nvSpPr>
-          <p:cNvPr id="3" name="Content Placeholder 2"/>
-          <p:cNvSpPr>
-            <a:spLocks noGrp="1"/>
-          </p:cNvSpPr>
-          <p:nvPr>
-            <p:ph idx="1"/>
-          </p:nvPr>
-        </p:nvSpPr>
-        <p:spPr/>
-        <p:txBody>
-          <a:bodyPr wrap="square"/>
-          <a:lstStyle/>
-          <a:p>
-            <a:pPr>
-              <a:defRPr sz="1600"/>
-            </a:pPr>
-            <a:r>
-              <a:t>Учёт мероприятий ведётся вручную</a:t>
-            </a:r>
-          </a:p>
-          <a:p>
-            <a:pPr>
-              <a:defRPr sz="1600"/>
-            </a:pPr>
-            <a:r>
-              <a:t>Нет единой системы регистрации на события</a:t>
-            </a:r>
-          </a:p>
-          <a:p>
-            <a:pPr>
-              <a:defRPr sz="1600"/>
-            </a:pPr>
-            <a:r>
-              <a:t>Организаторы тратят время на перекличку</a:t>
-            </a:r>
-          </a:p>
-          <a:p>
-            <a:pPr>
-              <a:defRPr sz="1600"/>
-            </a:pPr>
-            <a:r>
-              <a:t>Студенты не получают напоминания</a:t>
-            </a:r>
-          </a:p>
-          <a:p>
-            <a:pPr>
-              <a:defRPr sz="1600"/>
-            </a:pPr>
-            <a:r>
-              <a:t>Отсутствует аналитика по посещаемости</a:t>
-            </a:r>
-          </a:p>
-        </p:txBody>
-      </p:sp>
-    </p:spTree>
-  </p:cSld>
-  <p:clrMapOvr>
-    <a:masterClrMapping/>
-  </p:clrMapOvr>
-</p:sld>
-</file>
-
-<file path=ppt/slides/slide4.xml><?xml version="1.0" encoding="utf-8"?>
-<p:sld xmlns:a="http://schemas.openxmlformats.org/drawingml/2006/main" xmlns:p="http://schemas.openxmlformats.org/presentationml/2006/main" xmlns:r="http://schemas.openxmlformats.org/officeDocument/2006/relationships">
-  <p:cSld>
-    <p:spTree>
-      <p:nvGrpSpPr>
-        <p:cNvPr id="1" name=""/>
-        <p:cNvGrpSpPr/>
-        <p:nvPr/>
-      </p:nvGrpSpPr>
-      <p:grpSpPr/>
-      <p:sp>
-        <p:nvSpPr>
-          <p:cNvPr id="2" name="Title 1"/>
-          <p:cNvSpPr>
-            <a:spLocks noGrp="1"/>
-          </p:cNvSpPr>
-          <p:nvPr>
-            <p:ph type="title"/>
-          </p:nvPr>
-        </p:nvSpPr>
-        <p:spPr/>
-        <p:txBody>
-          <a:bodyPr/>
-          <a:lstStyle/>
-          <a:p>
-            <a:r>
-              <a:t>Решение — NCFU Events</a:t>
-            </a:r>
-          </a:p>
-        </p:txBody>
-      </p:sp>
-      <p:sp>
-        <p:nvSpPr>
-          <p:cNvPr id="3" name="Content Placeholder 2"/>
-          <p:cNvSpPr>
-            <a:spLocks noGrp="1"/>
-          </p:cNvSpPr>
-          <p:nvPr>
-            <p:ph idx="1"/>
-          </p:nvPr>
-        </p:nvSpPr>
-        <p:spPr/>
-        <p:txBody>
-          <a:bodyPr wrap="square"/>
-          <a:lstStyle/>
-          <a:p>
-            <a:pPr>
-              <a:defRPr sz="1600"/>
-            </a:pPr>
-            <a:r>
-              <a:t>Веб-приложение внутри мессенджера MAX</a:t>
-            </a:r>
-          </a:p>
-          <a:p>
-            <a:pPr>
-              <a:defRPr sz="1600"/>
-            </a:pPr>
-            <a:r>
-              <a:t>Регистрация через QR-коды</a:t>
-            </a:r>
-          </a:p>
-          <a:p>
-            <a:pPr>
-              <a:defRPr sz="1600"/>
-            </a:pPr>
-            <a:r>
-              <a:t>Отметка посещаемости через сканер</a:t>
-            </a:r>
-          </a:p>
-          <a:p>
-            <a:pPr>
-              <a:defRPr sz="1600"/>
-            </a:pPr>
-            <a:r>
-              <a:t>Уведомления через бота</a:t>
-            </a:r>
-          </a:p>
-          <a:p>
-            <a:pPr>
-              <a:defRPr sz="1600"/>
-            </a:pPr>
-            <a:r>
-              <a:t>Аналитика и отчёты</a:t>
-            </a:r>
-          </a:p>
-          <a:p>
-            <a:pPr>
-              <a:defRPr sz="1600"/>
-            </a:pPr>
-            <a:r>
-              <a:t>Три роли: студент, организатор, администратор</a:t>
-            </a:r>
-          </a:p>
-        </p:txBody>
-      </p:sp>
-    </p:spTree>
-  </p:cSld>
-  <p:clrMapOvr>
-    <a:masterClrMapping/>
-  </p:clrMapOvr>
-</p:sld>
-</file>
-
-<file path=ppt/slides/slide5.xml><?xml version="1.0" encoding="utf-8"?>
-<p:sld xmlns:a="http://schemas.openxmlformats.org/drawingml/2006/main" xmlns:p="http://schemas.openxmlformats.org/presentationml/2006/main" xmlns:r="http://schemas.openxmlformats.org/officeDocument/2006/relationships">
-  <p:cSld>
-    <p:spTree>
-      <p:nvGrpSpPr>
-        <p:cNvPr id="1" name=""/>
-        <p:cNvGrpSpPr/>
-        <p:nvPr/>
-      </p:nvGrpSpPr>
-      <p:grpSpPr/>
-      <p:sp>
-        <p:nvSpPr>
-          <p:cNvPr id="2" name="Title 1"/>
-          <p:cNvSpPr>
-            <a:spLocks noGrp="1"/>
-          </p:cNvSpPr>
-          <p:nvPr>
-            <p:ph type="title"/>
-          </p:nvPr>
-        </p:nvSpPr>
-        <p:spPr/>
-        <p:txBody>
-          <a:bodyPr/>
-          <a:lstStyle/>
-          <a:p>
-            <a:r>
-              <a:t>Архитектура</a:t>
-            </a:r>
-          </a:p>
-        </p:txBody>
-      </p:sp>
-      <p:sp>
-        <p:nvSpPr>
-          <p:cNvPr id="3" name="Content Placeholder 2"/>
-          <p:cNvSpPr>
-            <a:spLocks noGrp="1"/>
-          </p:cNvSpPr>
-          <p:nvPr>
-            <p:ph idx="1"/>
-          </p:nvPr>
-        </p:nvSpPr>
-        <p:spPr/>
-        <p:txBody>
-          <a:bodyPr wrap="square"/>
-          <a:lstStyle/>
-          <a:p>
-            <a:pPr>
-              <a:defRPr sz="1600"/>
-            </a:pPr>
-            <a:r>
-              <a:t>Frontend — Vue 3 + Vuetify 4 (SPA в MAX WebApp)</a:t>
-            </a:r>
-          </a:p>
-          <a:p>
-            <a:pPr>
-              <a:defRPr sz="1600"/>
-            </a:pPr>
-            <a:r>
-              <a:t>Backend — Fastify + TypeScript (REST API + Bot)</a:t>
-            </a:r>
-          </a:p>
-          <a:p>
-            <a:pPr>
-              <a:defRPr sz="1600"/>
-            </a:pPr>
-            <a:r>
-              <a:t>База данных — MariaDB + MikroORM</a:t>
-            </a:r>
-          </a:p>
-          <a:p>
-            <a:pPr>
-              <a:defRPr sz="1600"/>
-            </a:pPr>
-            <a:r>
-              <a:t>Бот — @maxhub/max-bot-api (long polling)</a:t>
-            </a:r>
-          </a:p>
-          <a:p>
-            <a:pPr>
-              <a:defRPr sz="1600"/>
-            </a:pPr>
-            <a:r>
-              <a:t>Уведомления — node-cron (планировщик)</a:t>
-            </a:r>
-          </a:p>
-          <a:p>
-            <a:pPr>
-              <a:defRPr sz="1600"/>
-            </a:pPr>
-            <a:r>
-              <a:t>Деплой — Docker + Nginx + Traefik</a:t>
-            </a:r>
-          </a:p>
-        </p:txBody>
-      </p:sp>
-    </p:spTree>
-  </p:cSld>
-  <p:clrMapOvr>
-    <a:masterClrMapping/>
-  </p:clrMapOvr>
-</p:sld>
-</file>
-
-<file path=ppt/slides/slide6.xml><?xml version="1.0" encoding="utf-8"?>
-<p:sld xmlns:a="http://schemas.openxmlformats.org/drawingml/2006/main" xmlns:p="http://schemas.openxmlformats.org/presentationml/2006/main" xmlns:r="http://schemas.openxmlformats.org/officeDocument/2006/relationships">
-  <p:cSld>
-    <p:spTree>
-      <p:nvGrpSpPr>
-        <p:cNvPr id="1" name=""/>
-        <p:cNvGrpSpPr/>
-        <p:nvPr/>
-      </p:nvGrpSpPr>
-      <p:grpSpPr/>
-      <p:sp>
-        <p:nvSpPr>
-          <p:cNvPr id="2" name="Title 1"/>
-          <p:cNvSpPr>
-            <a:spLocks noGrp="1"/>
-          </p:cNvSpPr>
-          <p:nvPr>
-            <p:ph type="title"/>
-          </p:nvPr>
-        </p:nvSpPr>
-        <p:spPr/>
-        <p:txBody>
-          <a:bodyPr/>
-          <a:lstStyle/>
-          <a:p>
-            <a:r>
-              <a:t>Технологический стек</a:t>
-            </a:r>
-          </a:p>
-        </p:txBody>
-      </p:sp>
-      <p:sp>
-        <p:nvSpPr>
-          <p:cNvPr id="3" name="Content Placeholder 2"/>
-          <p:cNvSpPr>
-            <a:spLocks noGrp="1"/>
-          </p:cNvSpPr>
-          <p:nvPr>
-            <p:ph idx="1" sz="half"/>
-          </p:nvPr>
-        </p:nvSpPr>
-        <p:spPr/>
-        <p:txBody>
-          <a:bodyPr wrap="square"/>
-          <a:lstStyle/>
-          <a:p>
-            <a:pPr>
-              <a:defRPr sz="1400"/>
-            </a:pPr>
-            <a:r>
-              <a:t>— Backend —</a:t>
-            </a:r>
-          </a:p>
-          <a:p>
-            <a:pPr>
-              <a:defRPr sz="1400"/>
-            </a:pPr>
-            <a:r>
-              <a:t>Node.js 24 + TypeScript</a:t>
-            </a:r>
-          </a:p>
-          <a:p>
-            <a:pPr>
-              <a:defRPr sz="1400"/>
-            </a:pPr>
-            <a:r>
-              <a:t>Fastify 5</a:t>
-            </a:r>
-          </a:p>
-          <a:p>
-            <a:pPr>
-              <a:defRPr sz="1400"/>
-            </a:pPr>
-            <a:r>
-              <a:t>MikroORM 7 + MariaDB</a:t>
-            </a:r>
-          </a:p>
-          <a:p>
-            <a:pPr>
-              <a:defRPr sz="1400"/>
-            </a:pPr>
-            <a:r>
-              <a:t>Zod (валидация)</a:t>
-            </a:r>
-          </a:p>
-          <a:p>
-            <a:pPr>
-              <a:defRPr sz="1400"/>
-            </a:pPr>
-            <a:r>
-              <a:t>Argon2 (хеширование)</a:t>
-            </a:r>
-          </a:p>
-          <a:p>
-            <a:pPr>
-              <a:defRPr sz="1400"/>
-            </a:pPr>
-            <a:r>
-              <a:t>@maxhub/max-bot-api</a:t>
-            </a:r>
-          </a:p>
-          <a:p>
-            <a:pPr>
-              <a:defRPr sz="1400"/>
-            </a:pPr>
-            <a:r>
-              <a:t>node-cron</a:t>
-            </a:r>
-          </a:p>
-        </p:txBody>
-      </p:sp>
-      <p:sp>
-        <p:nvSpPr>
-          <p:cNvPr id="4" name="Content Placeholder 3"/>
-          <p:cNvSpPr>
-            <a:spLocks noGrp="1"/>
-          </p:cNvSpPr>
-          <p:nvPr>
-            <p:ph idx="2" sz="half"/>
-          </p:nvPr>
-        </p:nvSpPr>
-        <p:spPr/>
-        <p:txBody>
-          <a:bodyPr wrap="square"/>
-          <a:lstStyle/>
-          <a:p>
-            <a:pPr>
-              <a:defRPr sz="1400"/>
-            </a:pPr>
-            <a:r>
-              <a:t>— Frontend —</a:t>
-            </a:r>
-          </a:p>
-          <a:p>
-            <a:pPr>
-              <a:defRPr sz="1400"/>
-            </a:pPr>
-            <a:r>
-              <a:t>Vue 3 (Composition API)</a:t>
-            </a:r>
-          </a:p>
-          <a:p>
-            <a:pPr>
-              <a:defRPr sz="1400"/>
-            </a:pPr>
-            <a:r>
-              <a:t>Vuetify 4 (Material Design)</a:t>
-            </a:r>
-          </a:p>
-          <a:p>
-            <a:pPr>
-              <a:defRPr sz="1400"/>
-            </a:pPr>
-            <a:r>
-              <a:t>Vite 8</a:t>
-            </a:r>
-          </a:p>
-          <a:p>
-            <a:pPr>
-              <a:defRPr sz="1400"/>
-            </a:pPr>
-            <a:r>
-              <a:t>Pinia 3</a:t>
-            </a:r>
-          </a:p>
-          <a:p>
-            <a:pPr>
-              <a:defRPr sz="1400"/>
-            </a:pPr>
-            <a:r>
-              <a:t>Vue Router 5 (файловый)</a:t>
-            </a:r>
-          </a:p>
-          <a:p>
-            <a:pPr>
-              <a:defRPr sz="1400"/>
-            </a:pPr>
-            <a:r>
-              <a:t>Axios + QRCode Vue3</a:t>
-            </a:r>
-          </a:p>
-        </p:txBody>
-      </p:sp>
-    </p:spTree>
-  </p:cSld>
-  <p:clrMapOvr>
-    <a:masterClrMapping/>
-  </p:clrMapOvr>
-</p:sld>
-</file>
-
-<file path=ppt/slides/slide7.xml><?xml version="1.0" encoding="utf-8"?>
-<p:sld xmlns:a="http://schemas.openxmlformats.org/drawingml/2006/main" xmlns:p="http://schemas.openxmlformats.org/presentationml/2006/main" xmlns:r="http://schemas.openxmlformats.org/officeDocument/2006/relationships">
-  <p:cSld>
-    <p:spTree>
-      <p:nvGrpSpPr>
-        <p:cNvPr id="1" name=""/>
-        <p:cNvGrpSpPr/>
-        <p:nvPr/>
-      </p:nvGrpSpPr>
-      <p:grpSpPr/>
-      <p:sp>
-        <p:nvSpPr>
-          <p:cNvPr id="2" name="Title 1"/>
-          <p:cNvSpPr>
-            <a:spLocks noGrp="1"/>
-          </p:cNvSpPr>
-          <p:nvPr>
-            <p:ph type="title"/>
-          </p:nvPr>
-        </p:nvSpPr>
-        <p:spPr/>
-        <p:txBody>
-          <a:bodyPr/>
-          <a:lstStyle/>
-          <a:p>
-            <a:r>
               <a:t>Путь администратора</a:t>
             </a:r>
           </a:p>
@@ -4152,7 +3211,7 @@
 </p:sld>
 </file>
 
-<file path=ppt/slides/slide8.xml><?xml version="1.0" encoding="utf-8"?>
+<file path=ppt/slides/slide11.xml><?xml version="1.0" encoding="utf-8"?>
 <p:sld xmlns:a="http://schemas.openxmlformats.org/drawingml/2006/main" xmlns:p="http://schemas.openxmlformats.org/presentationml/2006/main" xmlns:r="http://schemas.openxmlformats.org/officeDocument/2006/relationships">
   <p:cSld>
     <p:spTree>
@@ -4302,7 +3361,7 @@
 </p:sld>
 </file>
 
-<file path=ppt/slides/slide9.xml><?xml version="1.0" encoding="utf-8"?>
+<file path=ppt/slides/slide12.xml><?xml version="1.0" encoding="utf-8"?>
 <p:sld xmlns:a="http://schemas.openxmlformats.org/drawingml/2006/main" xmlns:p="http://schemas.openxmlformats.org/presentationml/2006/main" xmlns:r="http://schemas.openxmlformats.org/officeDocument/2006/relationships">
   <p:cSld>
     <p:spTree>
@@ -4452,6 +3511,1559 @@
           </a:prstGeom>
         </p:spPr>
       </p:pic>
+    </p:spTree>
+  </p:cSld>
+  <p:clrMapOvr>
+    <a:masterClrMapping/>
+  </p:clrMapOvr>
+</p:sld>
+</file>
+
+<file path=ppt/slides/slide13.xml><?xml version="1.0" encoding="utf-8"?>
+<p:sld xmlns:a="http://schemas.openxmlformats.org/drawingml/2006/main" xmlns:p="http://schemas.openxmlformats.org/presentationml/2006/main" xmlns:r="http://schemas.openxmlformats.org/officeDocument/2006/relationships">
+  <p:cSld>
+    <p:spTree>
+      <p:nvGrpSpPr>
+        <p:cNvPr id="1" name=""/>
+        <p:cNvGrpSpPr/>
+        <p:nvPr/>
+      </p:nvGrpSpPr>
+      <p:grpSpPr/>
+      <p:sp>
+        <p:nvSpPr>
+          <p:cNvPr id="2" name="Title 1"/>
+          <p:cNvSpPr>
+            <a:spLocks noGrp="1"/>
+          </p:cNvSpPr>
+          <p:nvPr>
+            <p:ph type="title"/>
+          </p:nvPr>
+        </p:nvSpPr>
+        <p:spPr/>
+        <p:txBody>
+          <a:bodyPr/>
+          <a:lstStyle/>
+          <a:p>
+            <a:r>
+              <a:t>Бот MAX и уведомления</a:t>
+            </a:r>
+          </a:p>
+        </p:txBody>
+      </p:sp>
+      <p:sp>
+        <p:nvSpPr>
+          <p:cNvPr id="3" name="Content Placeholder 2"/>
+          <p:cNvSpPr>
+            <a:spLocks noGrp="1"/>
+          </p:cNvSpPr>
+          <p:nvPr>
+            <p:ph idx="1"/>
+          </p:nvPr>
+        </p:nvSpPr>
+        <p:spPr/>
+        <p:txBody>
+          <a:bodyPr wrap="square"/>
+          <a:lstStyle/>
+          <a:p>
+            <a:pPr>
+              <a:defRPr sz="1600"/>
+            </a:pPr>
+            <a:r>
+              <a:t>Команды:</a:t>
+            </a:r>
+          </a:p>
+          <a:p>
+            <a:pPr lvl="1">
+              <a:defRPr sz="1600"/>
+            </a:pPr>
+            <a:r>
+              <a:t>  /start — приветствие</a:t>
+            </a:r>
+          </a:p>
+          <a:p>
+            <a:pPr lvl="1">
+              <a:defRPr sz="1600"/>
+            </a:pPr>
+            <a:r>
+              <a:t>  /events — предстоящие мероприятия</a:t>
+            </a:r>
+          </a:p>
+          <a:p>
+            <a:pPr>
+              <a:defRPr sz="1600"/>
+            </a:pPr>
+          </a:p>
+          <a:p>
+            <a:pPr>
+              <a:defRPr sz="1600"/>
+            </a:pPr>
+            <a:r>
+              <a:t>Cron-уведомления:</a:t>
+            </a:r>
+          </a:p>
+          <a:p>
+            <a:pPr lvl="1">
+              <a:defRPr sz="1600"/>
+            </a:pPr>
+            <a:r>
+              <a:t>  7:00 МСК — утреннее напоминание</a:t>
+            </a:r>
+          </a:p>
+          <a:p>
+            <a:pPr lvl="1">
+              <a:defRPr sz="1600"/>
+            </a:pPr>
+            <a:r>
+              <a:t>  За 30 минут — напоминание перед началом</a:t>
+            </a:r>
+          </a:p>
+          <a:p>
+            <a:pPr>
+              <a:defRPr sz="1600"/>
+            </a:pPr>
+          </a:p>
+          <a:p>
+            <a:pPr>
+              <a:defRPr sz="1600"/>
+            </a:pPr>
+            <a:r>
+              <a:t>Мгновенное уведомление при обновлении</a:t>
+            </a:r>
+          </a:p>
+          <a:p>
+            <a:pPr>
+              <a:defRPr sz="1600"/>
+            </a:pPr>
+            <a:r>
+              <a:t>Настройка вкл/выкл в профиле</a:t>
+            </a:r>
+          </a:p>
+        </p:txBody>
+      </p:sp>
+    </p:spTree>
+  </p:cSld>
+  <p:clrMapOvr>
+    <a:masterClrMapping/>
+  </p:clrMapOvr>
+</p:sld>
+</file>
+
+<file path=ppt/slides/slide14.xml><?xml version="1.0" encoding="utf-8"?>
+<p:sld xmlns:a="http://schemas.openxmlformats.org/drawingml/2006/main" xmlns:p="http://schemas.openxmlformats.org/presentationml/2006/main" xmlns:r="http://schemas.openxmlformats.org/officeDocument/2006/relationships">
+  <p:cSld>
+    <p:spTree>
+      <p:nvGrpSpPr>
+        <p:cNvPr id="1" name=""/>
+        <p:cNvGrpSpPr/>
+        <p:nvPr/>
+      </p:nvGrpSpPr>
+      <p:grpSpPr/>
+      <p:sp>
+        <p:nvSpPr>
+          <p:cNvPr id="2" name="Title 1"/>
+          <p:cNvSpPr>
+            <a:spLocks noGrp="1"/>
+          </p:cNvSpPr>
+          <p:nvPr>
+            <p:ph type="title"/>
+          </p:nvPr>
+        </p:nvSpPr>
+        <p:spPr/>
+        <p:txBody>
+          <a:bodyPr/>
+          <a:lstStyle/>
+          <a:p>
+            <a:r>
+              <a:t>Безопасность</a:t>
+            </a:r>
+          </a:p>
+        </p:txBody>
+      </p:sp>
+      <p:sp>
+        <p:nvSpPr>
+          <p:cNvPr id="3" name="Content Placeholder 2"/>
+          <p:cNvSpPr>
+            <a:spLocks noGrp="1"/>
+          </p:cNvSpPr>
+          <p:nvPr>
+            <p:ph idx="1"/>
+          </p:nvPr>
+        </p:nvSpPr>
+        <p:spPr/>
+        <p:txBody>
+          <a:bodyPr wrap="square"/>
+          <a:lstStyle/>
+          <a:p>
+            <a:pPr>
+              <a:defRPr sz="1600"/>
+            </a:pPr>
+            <a:r>
+              <a:t>Авторизация через InitData мессенджера MAX</a:t>
+            </a:r>
+          </a:p>
+          <a:p>
+            <a:pPr>
+              <a:defRPr sz="1600"/>
+            </a:pPr>
+            <a:r>
+              <a:t>Валидация подписи HMAC-SHA256</a:t>
+            </a:r>
+          </a:p>
+          <a:p>
+            <a:pPr>
+              <a:defRPr sz="1600"/>
+            </a:pPr>
+            <a:r>
+              <a:t>Ролевой контроль доступа (RBAC)</a:t>
+            </a:r>
+          </a:p>
+          <a:p>
+            <a:pPr>
+              <a:defRPr sz="1600"/>
+            </a:pPr>
+            <a:r>
+              <a:t>Валидация данных через Zod</a:t>
+            </a:r>
+          </a:p>
+          <a:p>
+            <a:pPr>
+              <a:defRPr sz="1600"/>
+            </a:pPr>
+            <a:r>
+              <a:t>CORS + Helmet + Rate Limiting</a:t>
+            </a:r>
+          </a:p>
+        </p:txBody>
+      </p:sp>
+    </p:spTree>
+  </p:cSld>
+  <p:clrMapOvr>
+    <a:masterClrMapping/>
+  </p:clrMapOvr>
+</p:sld>
+</file>
+
+<file path=ppt/slides/slide15.xml><?xml version="1.0" encoding="utf-8"?>
+<p:sld xmlns:a="http://schemas.openxmlformats.org/drawingml/2006/main" xmlns:p="http://schemas.openxmlformats.org/presentationml/2006/main" xmlns:r="http://schemas.openxmlformats.org/officeDocument/2006/relationships">
+  <p:cSld>
+    <p:spTree>
+      <p:nvGrpSpPr>
+        <p:cNvPr id="1" name=""/>
+        <p:cNvGrpSpPr/>
+        <p:nvPr/>
+      </p:nvGrpSpPr>
+      <p:grpSpPr/>
+      <p:sp>
+        <p:nvSpPr>
+          <p:cNvPr id="2" name="Title 1"/>
+          <p:cNvSpPr>
+            <a:spLocks noGrp="1"/>
+          </p:cNvSpPr>
+          <p:nvPr>
+            <p:ph type="title"/>
+          </p:nvPr>
+        </p:nvSpPr>
+        <p:spPr/>
+        <p:txBody>
+          <a:bodyPr/>
+          <a:lstStyle/>
+          <a:p>
+            <a:r>
+              <a:t>Востребованность решения</a:t>
+            </a:r>
+          </a:p>
+        </p:txBody>
+      </p:sp>
+      <p:sp>
+        <p:nvSpPr>
+          <p:cNvPr id="3" name="Content Placeholder 2"/>
+          <p:cNvSpPr>
+            <a:spLocks noGrp="1"/>
+          </p:cNvSpPr>
+          <p:nvPr>
+            <p:ph idx="1"/>
+          </p:nvPr>
+        </p:nvSpPr>
+        <p:spPr/>
+        <p:txBody>
+          <a:bodyPr wrap="square"/>
+          <a:lstStyle/>
+          <a:p>
+            <a:pPr>
+              <a:defRPr sz="1600"/>
+            </a:pPr>
+            <a:r>
+              <a:t>СКФУ проводит сотни мероприятий ежегодно</a:t>
+            </a:r>
+          </a:p>
+          <a:p>
+            <a:pPr>
+              <a:defRPr sz="1600"/>
+            </a:pPr>
+            <a:r>
+              <a:t>Более 40 000 студентов — потенциальные пользователи</a:t>
+            </a:r>
+          </a:p>
+          <a:p>
+            <a:pPr>
+              <a:defRPr sz="1600"/>
+            </a:pPr>
+            <a:r>
+              <a:t>Текущий процесс: Google Forms + бумажные списки</a:t>
+            </a:r>
+          </a:p>
+          <a:p>
+            <a:pPr>
+              <a:defRPr sz="1600"/>
+            </a:pPr>
+            <a:r>
+              <a:t>Мессенджер MAX набирает популярность в России</a:t>
+            </a:r>
+          </a:p>
+          <a:p>
+            <a:pPr>
+              <a:defRPr sz="1600"/>
+            </a:pPr>
+            <a:r>
+              <a:t>Мини-приложения в мессенджерах — тренд автоматизации</a:t>
+            </a:r>
+          </a:p>
+          <a:p>
+            <a:pPr>
+              <a:defRPr sz="1600"/>
+            </a:pPr>
+          </a:p>
+          <a:p>
+            <a:pPr>
+              <a:defRPr sz="1600"/>
+            </a:pPr>
+            <a:r>
+              <a:t>Аналоги:</a:t>
+            </a:r>
+          </a:p>
+          <a:p>
+            <a:pPr lvl="1">
+              <a:defRPr sz="1600"/>
+            </a:pPr>
+            <a:r>
+              <a:t>Timepad, Leader-ID — не интегрированы в мессенджер</a:t>
+            </a:r>
+          </a:p>
+          <a:p>
+            <a:pPr lvl="1">
+              <a:defRPr sz="1600"/>
+            </a:pPr>
+            <a:r>
+              <a:t>Telegram-боты вузов — нет мини-приложений и QR</a:t>
+            </a:r>
+          </a:p>
+          <a:p>
+            <a:pPr lvl="1">
+              <a:defRPr sz="1600"/>
+            </a:pPr>
+            <a:r>
+              <a:t>Наше решение — единый сервис внутри MAX</a:t>
+            </a:r>
+          </a:p>
+        </p:txBody>
+      </p:sp>
+    </p:spTree>
+  </p:cSld>
+  <p:clrMapOvr>
+    <a:masterClrMapping/>
+  </p:clrMapOvr>
+</p:sld>
+</file>
+
+<file path=ppt/slides/slide16.xml><?xml version="1.0" encoding="utf-8"?>
+<p:sld xmlns:a="http://schemas.openxmlformats.org/drawingml/2006/main" xmlns:p="http://schemas.openxmlformats.org/presentationml/2006/main" xmlns:r="http://schemas.openxmlformats.org/officeDocument/2006/relationships">
+  <p:cSld>
+    <p:spTree>
+      <p:nvGrpSpPr>
+        <p:cNvPr id="1" name=""/>
+        <p:cNvGrpSpPr/>
+        <p:nvPr/>
+      </p:nvGrpSpPr>
+      <p:grpSpPr/>
+      <p:sp>
+        <p:nvSpPr>
+          <p:cNvPr id="2" name="Title 1"/>
+          <p:cNvSpPr>
+            <a:spLocks noGrp="1"/>
+          </p:cNvSpPr>
+          <p:nvPr>
+            <p:ph type="title"/>
+          </p:nvPr>
+        </p:nvSpPr>
+        <p:spPr/>
+        <p:txBody>
+          <a:bodyPr/>
+          <a:lstStyle/>
+          <a:p>
+            <a:r>
+              <a:t>Итоги</a:t>
+            </a:r>
+          </a:p>
+        </p:txBody>
+      </p:sp>
+      <p:sp>
+        <p:nvSpPr>
+          <p:cNvPr id="3" name="Content Placeholder 2"/>
+          <p:cNvSpPr>
+            <a:spLocks noGrp="1"/>
+          </p:cNvSpPr>
+          <p:nvPr>
+            <p:ph idx="1"/>
+          </p:nvPr>
+        </p:nvSpPr>
+        <p:spPr/>
+        <p:txBody>
+          <a:bodyPr wrap="square"/>
+          <a:lstStyle/>
+          <a:p>
+            <a:pPr>
+              <a:defRPr sz="1600"/>
+            </a:pPr>
+            <a:r>
+              <a:t>✅ Полный цикл: регистрация → посещение</a:t>
+            </a:r>
+          </a:p>
+          <a:p>
+            <a:pPr>
+              <a:defRPr sz="1600"/>
+            </a:pPr>
+            <a:r>
+              <a:t>✅ Три роли с отдельными интерфейсами</a:t>
+            </a:r>
+          </a:p>
+          <a:p>
+            <a:pPr>
+              <a:defRPr sz="1600"/>
+            </a:pPr>
+            <a:r>
+              <a:t>✅ QR-коды для регистрации и посещаемости</a:t>
+            </a:r>
+          </a:p>
+          <a:p>
+            <a:pPr>
+              <a:defRPr sz="1600"/>
+            </a:pPr>
+            <a:r>
+              <a:t>✅ Бот с уведомлениями по расписанию</a:t>
+            </a:r>
+          </a:p>
+          <a:p>
+            <a:pPr>
+              <a:defRPr sz="1600"/>
+            </a:pPr>
+            <a:r>
+              <a:t>✅ Аналитика и отчёты</a:t>
+            </a:r>
+          </a:p>
+          <a:p>
+            <a:pPr>
+              <a:defRPr sz="1600"/>
+            </a:pPr>
+            <a:r>
+              <a:t>✅ Docker-деплой + VitePress-документация</a:t>
+            </a:r>
+          </a:p>
+          <a:p>
+            <a:pPr>
+              <a:defRPr sz="1600"/>
+            </a:pPr>
+          </a:p>
+          <a:p>
+            <a:pPr>
+              <a:defRPr sz="1600"/>
+            </a:pPr>
+            <a:r>
+              <a:t>Спасибо за внимание!</a:t>
+            </a:r>
+          </a:p>
+        </p:txBody>
+      </p:sp>
+    </p:spTree>
+  </p:cSld>
+  <p:clrMapOvr>
+    <a:masterClrMapping/>
+  </p:clrMapOvr>
+</p:sld>
+</file>
+
+<file path=ppt/slides/slide2.xml><?xml version="1.0" encoding="utf-8"?>
+<p:sld xmlns:a="http://schemas.openxmlformats.org/drawingml/2006/main" xmlns:p="http://schemas.openxmlformats.org/presentationml/2006/main" xmlns:r="http://schemas.openxmlformats.org/officeDocument/2006/relationships">
+  <p:cSld>
+    <p:spTree>
+      <p:nvGrpSpPr>
+        <p:cNvPr id="1" name=""/>
+        <p:cNvGrpSpPr/>
+        <p:nvPr/>
+      </p:nvGrpSpPr>
+      <p:grpSpPr/>
+      <p:sp>
+        <p:nvSpPr>
+          <p:cNvPr id="2" name="Title 1"/>
+          <p:cNvSpPr>
+            <a:spLocks noGrp="1"/>
+          </p:cNvSpPr>
+          <p:nvPr>
+            <p:ph type="title"/>
+          </p:nvPr>
+        </p:nvSpPr>
+        <p:spPr/>
+        <p:txBody>
+          <a:bodyPr/>
+          <a:lstStyle/>
+          <a:p>
+            <a:r>
+              <a:t>Команда «Фермеры»</a:t>
+            </a:r>
+          </a:p>
+        </p:txBody>
+      </p:sp>
+      <p:sp>
+        <p:nvSpPr>
+          <p:cNvPr id="3" name="Content Placeholder 2"/>
+          <p:cNvSpPr>
+            <a:spLocks noGrp="1"/>
+          </p:cNvSpPr>
+          <p:nvPr>
+            <p:ph idx="1"/>
+          </p:nvPr>
+        </p:nvSpPr>
+        <p:spPr/>
+        <p:txBody>
+          <a:bodyPr wrap="square"/>
+          <a:lstStyle/>
+          <a:p>
+            <a:pPr>
+              <a:defRPr sz="1600"/>
+            </a:pPr>
+            <a:r>
+              <a:t>Мангушев Максим Андреевич — капитан</a:t>
+            </a:r>
+          </a:p>
+          <a:p>
+            <a:pPr lvl="1">
+              <a:defRPr sz="1600"/>
+            </a:pPr>
+            <a:r>
+              <a:t>Группа: н-ИСТ-б-о-23-1</a:t>
+            </a:r>
+          </a:p>
+          <a:p>
+            <a:pPr>
+              <a:defRPr sz="1600"/>
+            </a:pPr>
+          </a:p>
+          <a:p>
+            <a:pPr>
+              <a:defRPr sz="1600"/>
+            </a:pPr>
+            <a:r>
+              <a:t>Усачёв Богдан Максимович — участник</a:t>
+            </a:r>
+          </a:p>
+          <a:p>
+            <a:pPr lvl="1">
+              <a:defRPr sz="1600"/>
+            </a:pPr>
+            <a:r>
+              <a:t>Группа: н-ИСТ-б-о-23-1</a:t>
+            </a:r>
+          </a:p>
+          <a:p>
+            <a:pPr>
+              <a:defRPr sz="1600"/>
+            </a:pPr>
+          </a:p>
+          <a:p>
+            <a:pPr>
+              <a:defRPr sz="1600"/>
+            </a:pPr>
+            <a:r>
+              <a:t>Сосенко Валентин Евгеньевич — участник</a:t>
+            </a:r>
+          </a:p>
+          <a:p>
+            <a:pPr lvl="1">
+              <a:defRPr sz="1600"/>
+            </a:pPr>
+            <a:r>
+              <a:t>Группа: н-ИСТ-б-о-23-1</a:t>
+            </a:r>
+          </a:p>
+        </p:txBody>
+      </p:sp>
+    </p:spTree>
+  </p:cSld>
+  <p:clrMapOvr>
+    <a:masterClrMapping/>
+  </p:clrMapOvr>
+</p:sld>
+</file>
+
+<file path=ppt/slides/slide3.xml><?xml version="1.0" encoding="utf-8"?>
+<p:sld xmlns:a="http://schemas.openxmlformats.org/drawingml/2006/main" xmlns:p="http://schemas.openxmlformats.org/presentationml/2006/main" xmlns:r="http://schemas.openxmlformats.org/officeDocument/2006/relationships">
+  <p:cSld>
+    <p:spTree>
+      <p:nvGrpSpPr>
+        <p:cNvPr id="1" name=""/>
+        <p:cNvGrpSpPr/>
+        <p:nvPr/>
+      </p:nvGrpSpPr>
+      <p:grpSpPr/>
+      <p:sp>
+        <p:nvSpPr>
+          <p:cNvPr id="2" name="Title 1"/>
+          <p:cNvSpPr>
+            <a:spLocks noGrp="1"/>
+          </p:cNvSpPr>
+          <p:nvPr>
+            <p:ph type="title"/>
+          </p:nvPr>
+        </p:nvSpPr>
+        <p:spPr/>
+        <p:txBody>
+          <a:bodyPr/>
+          <a:lstStyle/>
+          <a:p>
+            <a:r>
+              <a:t>Целевая аудитория</a:t>
+            </a:r>
+          </a:p>
+        </p:txBody>
+      </p:sp>
+      <p:sp>
+        <p:nvSpPr>
+          <p:cNvPr id="3" name="Content Placeholder 2"/>
+          <p:cNvSpPr>
+            <a:spLocks noGrp="1"/>
+          </p:cNvSpPr>
+          <p:nvPr>
+            <p:ph idx="1"/>
+          </p:nvPr>
+        </p:nvSpPr>
+        <p:spPr/>
+        <p:txBody>
+          <a:bodyPr wrap="square"/>
+          <a:lstStyle/>
+          <a:p>
+            <a:pPr>
+              <a:defRPr sz="1600"/>
+            </a:pPr>
+            <a:r>
+              <a:t>Студенты СКФУ</a:t>
+            </a:r>
+          </a:p>
+          <a:p>
+            <a:pPr lvl="1">
+              <a:defRPr sz="1600"/>
+            </a:pPr>
+            <a:r>
+              <a:t>Хотят быстро находить мероприятия и регистрироваться</a:t>
+            </a:r>
+          </a:p>
+          <a:p>
+            <a:pPr lvl="1">
+              <a:defRPr sz="1600"/>
+            </a:pPr>
+            <a:r>
+              <a:t>Нуждаются в напоминаниях о событиях</a:t>
+            </a:r>
+          </a:p>
+          <a:p>
+            <a:pPr>
+              <a:defRPr sz="1600"/>
+            </a:pPr>
+          </a:p>
+          <a:p>
+            <a:pPr>
+              <a:defRPr sz="1600"/>
+            </a:pPr>
+            <a:r>
+              <a:t>Организаторы мероприятий</a:t>
+            </a:r>
+          </a:p>
+          <a:p>
+            <a:pPr lvl="1">
+              <a:defRPr sz="1600"/>
+            </a:pPr>
+            <a:r>
+              <a:t>Нуждаются в инструментах учёта участников</a:t>
+            </a:r>
+          </a:p>
+          <a:p>
+            <a:pPr lvl="1">
+              <a:defRPr sz="1600"/>
+            </a:pPr>
+            <a:r>
+              <a:t>Хотят автоматизировать контроль посещаемости</a:t>
+            </a:r>
+          </a:p>
+          <a:p>
+            <a:pPr>
+              <a:defRPr sz="1600"/>
+            </a:pPr>
+          </a:p>
+          <a:p>
+            <a:pPr>
+              <a:defRPr sz="1600"/>
+            </a:pPr>
+            <a:r>
+              <a:t>Администрация университета</a:t>
+            </a:r>
+          </a:p>
+          <a:p>
+            <a:pPr lvl="1">
+              <a:defRPr sz="1600"/>
+            </a:pPr>
+            <a:r>
+              <a:t>Нуждается в аналитике вовлечённости студентов</a:t>
+            </a:r>
+          </a:p>
+          <a:p>
+            <a:pPr lvl="1">
+              <a:defRPr sz="1600"/>
+            </a:pPr>
+            <a:r>
+              <a:t>Хочет видеть эффективность мероприятий по институтам</a:t>
+            </a:r>
+          </a:p>
+        </p:txBody>
+      </p:sp>
+    </p:spTree>
+  </p:cSld>
+  <p:clrMapOvr>
+    <a:masterClrMapping/>
+  </p:clrMapOvr>
+</p:sld>
+</file>
+
+<file path=ppt/slides/slide4.xml><?xml version="1.0" encoding="utf-8"?>
+<p:sld xmlns:a="http://schemas.openxmlformats.org/drawingml/2006/main" xmlns:p="http://schemas.openxmlformats.org/presentationml/2006/main" xmlns:r="http://schemas.openxmlformats.org/officeDocument/2006/relationships">
+  <p:cSld>
+    <p:spTree>
+      <p:nvGrpSpPr>
+        <p:cNvPr id="1" name=""/>
+        <p:cNvGrpSpPr/>
+        <p:nvPr/>
+      </p:nvGrpSpPr>
+      <p:grpSpPr/>
+      <p:sp>
+        <p:nvSpPr>
+          <p:cNvPr id="2" name="Title 1"/>
+          <p:cNvSpPr>
+            <a:spLocks noGrp="1"/>
+          </p:cNvSpPr>
+          <p:nvPr>
+            <p:ph type="title"/>
+          </p:nvPr>
+        </p:nvSpPr>
+        <p:spPr/>
+        <p:txBody>
+          <a:bodyPr/>
+          <a:lstStyle/>
+          <a:p>
+            <a:r>
+              <a:t>Проблема</a:t>
+            </a:r>
+          </a:p>
+        </p:txBody>
+      </p:sp>
+      <p:sp>
+        <p:nvSpPr>
+          <p:cNvPr id="3" name="Content Placeholder 2"/>
+          <p:cNvSpPr>
+            <a:spLocks noGrp="1"/>
+          </p:cNvSpPr>
+          <p:nvPr>
+            <p:ph idx="1"/>
+          </p:nvPr>
+        </p:nvSpPr>
+        <p:spPr/>
+        <p:txBody>
+          <a:bodyPr wrap="square"/>
+          <a:lstStyle/>
+          <a:p>
+            <a:pPr>
+              <a:defRPr sz="1600"/>
+            </a:pPr>
+            <a:r>
+              <a:t>Регистрация разрознена: Google Forms, ВК, сайт, онлайн-формы</a:t>
+            </a:r>
+          </a:p>
+          <a:p>
+            <a:pPr>
+              <a:defRPr sz="1600"/>
+            </a:pPr>
+            <a:r>
+              <a:t>Посещаемость — бумажные списки и ручной ввод в таблицы</a:t>
+            </a:r>
+          </a:p>
+          <a:p>
+            <a:pPr>
+              <a:defRPr sz="1600"/>
+            </a:pPr>
+            <a:r>
+              <a:t>Дублирование информации и потеря данных</a:t>
+            </a:r>
+          </a:p>
+          <a:p>
+            <a:pPr>
+              <a:defRPr sz="1600"/>
+            </a:pPr>
+            <a:r>
+              <a:t>Невозможно анализировать эффективность мероприятий</a:t>
+            </a:r>
+          </a:p>
+          <a:p>
+            <a:pPr>
+              <a:defRPr sz="1600"/>
+            </a:pPr>
+            <a:r>
+              <a:t>Студенты не получают напоминания о событиях</a:t>
+            </a:r>
+          </a:p>
+          <a:p>
+            <a:pPr>
+              <a:defRPr sz="1600"/>
+            </a:pPr>
+            <a:r>
+              <a:t>Нет единого цифрового инструмента</a:t>
+            </a:r>
+          </a:p>
+        </p:txBody>
+      </p:sp>
+    </p:spTree>
+  </p:cSld>
+  <p:clrMapOvr>
+    <a:masterClrMapping/>
+  </p:clrMapOvr>
+</p:sld>
+</file>
+
+<file path=ppt/slides/slide5.xml><?xml version="1.0" encoding="utf-8"?>
+<p:sld xmlns:a="http://schemas.openxmlformats.org/drawingml/2006/main" xmlns:p="http://schemas.openxmlformats.org/presentationml/2006/main" xmlns:r="http://schemas.openxmlformats.org/officeDocument/2006/relationships">
+  <p:cSld>
+    <p:spTree>
+      <p:nvGrpSpPr>
+        <p:cNvPr id="1" name=""/>
+        <p:cNvGrpSpPr/>
+        <p:nvPr/>
+      </p:nvGrpSpPr>
+      <p:grpSpPr/>
+      <p:sp>
+        <p:nvSpPr>
+          <p:cNvPr id="2" name="Title 1"/>
+          <p:cNvSpPr>
+            <a:spLocks noGrp="1"/>
+          </p:cNvSpPr>
+          <p:nvPr>
+            <p:ph type="title"/>
+          </p:nvPr>
+        </p:nvSpPr>
+        <p:spPr/>
+        <p:txBody>
+          <a:bodyPr/>
+          <a:lstStyle/>
+          <a:p>
+            <a:r>
+              <a:t>Решение — NCFU Events</a:t>
+            </a:r>
+          </a:p>
+        </p:txBody>
+      </p:sp>
+      <p:sp>
+        <p:nvSpPr>
+          <p:cNvPr id="3" name="Content Placeholder 2"/>
+          <p:cNvSpPr>
+            <a:spLocks noGrp="1"/>
+          </p:cNvSpPr>
+          <p:nvPr>
+            <p:ph idx="1"/>
+          </p:nvPr>
+        </p:nvSpPr>
+        <p:spPr/>
+        <p:txBody>
+          <a:bodyPr wrap="square"/>
+          <a:lstStyle/>
+          <a:p>
+            <a:pPr>
+              <a:defRPr sz="1600"/>
+            </a:pPr>
+            <a:r>
+              <a:t>Единый сервис в мессенджере MAX</a:t>
+            </a:r>
+          </a:p>
+          <a:p>
+            <a:pPr>
+              <a:defRPr sz="1600"/>
+            </a:pPr>
+            <a:r>
+              <a:t>Мини-приложение + чат-бот в одном решении</a:t>
+            </a:r>
+          </a:p>
+          <a:p>
+            <a:pPr>
+              <a:defRPr sz="1600"/>
+            </a:pPr>
+            <a:r>
+              <a:t>Регистрация и посещаемость через QR-коды</a:t>
+            </a:r>
+          </a:p>
+          <a:p>
+            <a:pPr>
+              <a:defRPr sz="1600"/>
+            </a:pPr>
+            <a:r>
+              <a:t>Автоматические уведомления по расписанию</a:t>
+            </a:r>
+          </a:p>
+          <a:p>
+            <a:pPr>
+              <a:defRPr sz="1600"/>
+            </a:pPr>
+            <a:r>
+              <a:t>Аналитика и отчёты в реальном времени</a:t>
+            </a:r>
+          </a:p>
+          <a:p>
+            <a:pPr>
+              <a:defRPr sz="1600"/>
+            </a:pPr>
+            <a:r>
+              <a:t>Три роли: студент, организатор, администратор</a:t>
+            </a:r>
+          </a:p>
+        </p:txBody>
+      </p:sp>
+    </p:spTree>
+  </p:cSld>
+  <p:clrMapOvr>
+    <a:masterClrMapping/>
+  </p:clrMapOvr>
+</p:sld>
+</file>
+
+<file path=ppt/slides/slide6.xml><?xml version="1.0" encoding="utf-8"?>
+<p:sld xmlns:a="http://schemas.openxmlformats.org/drawingml/2006/main" xmlns:p="http://schemas.openxmlformats.org/presentationml/2006/main" xmlns:r="http://schemas.openxmlformats.org/officeDocument/2006/relationships">
+  <p:cSld>
+    <p:spTree>
+      <p:nvGrpSpPr>
+        <p:cNvPr id="1" name=""/>
+        <p:cNvGrpSpPr/>
+        <p:nvPr/>
+      </p:nvGrpSpPr>
+      <p:grpSpPr/>
+      <p:sp>
+        <p:nvSpPr>
+          <p:cNvPr id="2" name="Title 1"/>
+          <p:cNvSpPr>
+            <a:spLocks noGrp="1"/>
+          </p:cNvSpPr>
+          <p:nvPr>
+            <p:ph type="title"/>
+          </p:nvPr>
+        </p:nvSpPr>
+        <p:spPr/>
+        <p:txBody>
+          <a:bodyPr/>
+          <a:lstStyle/>
+          <a:p>
+            <a:r>
+              <a:t>Технические требования</a:t>
+            </a:r>
+          </a:p>
+        </p:txBody>
+      </p:sp>
+      <p:sp>
+        <p:nvSpPr>
+          <p:cNvPr id="3" name="Content Placeholder 2"/>
+          <p:cNvSpPr>
+            <a:spLocks noGrp="1"/>
+          </p:cNvSpPr>
+          <p:nvPr>
+            <p:ph idx="1" sz="half"/>
+          </p:nvPr>
+        </p:nvSpPr>
+        <p:spPr/>
+        <p:txBody>
+          <a:bodyPr wrap="square"/>
+          <a:lstStyle/>
+          <a:p>
+            <a:pPr>
+              <a:defRPr sz="1400"/>
+            </a:pPr>
+            <a:r>
+              <a:t>— Функциональные —</a:t>
+            </a:r>
+          </a:p>
+          <a:p>
+            <a:pPr>
+              <a:defRPr sz="1400"/>
+            </a:pPr>
+            <a:r>
+              <a:t>Регистрация на мероприятия</a:t>
+            </a:r>
+          </a:p>
+          <a:p>
+            <a:pPr>
+              <a:defRPr sz="1400"/>
+            </a:pPr>
+            <a:r>
+              <a:t>Генерация QR-кодов</a:t>
+            </a:r>
+          </a:p>
+          <a:p>
+            <a:pPr>
+              <a:defRPr sz="1400"/>
+            </a:pPr>
+            <a:r>
+              <a:t>Сканер посещаемости</a:t>
+            </a:r>
+          </a:p>
+          <a:p>
+            <a:pPr>
+              <a:defRPr sz="1400"/>
+            </a:pPr>
+            <a:r>
+              <a:t>Уведомления через бота</a:t>
+            </a:r>
+          </a:p>
+          <a:p>
+            <a:pPr>
+              <a:defRPr sz="1400"/>
+            </a:pPr>
+            <a:r>
+              <a:t>Формирование отчётов</a:t>
+            </a:r>
+          </a:p>
+          <a:p>
+            <a:pPr>
+              <a:defRPr sz="1400"/>
+            </a:pPr>
+            <a:r>
+              <a:t>Ролевой доступ (RBAC)</a:t>
+            </a:r>
+          </a:p>
+        </p:txBody>
+      </p:sp>
+      <p:sp>
+        <p:nvSpPr>
+          <p:cNvPr id="4" name="Content Placeholder 3"/>
+          <p:cNvSpPr>
+            <a:spLocks noGrp="1"/>
+          </p:cNvSpPr>
+          <p:nvPr>
+            <p:ph idx="2" sz="half"/>
+          </p:nvPr>
+        </p:nvSpPr>
+        <p:spPr/>
+        <p:txBody>
+          <a:bodyPr wrap="square"/>
+          <a:lstStyle/>
+          <a:p>
+            <a:pPr>
+              <a:defRPr sz="1400"/>
+            </a:pPr>
+            <a:r>
+              <a:t>— Нефункциональные —</a:t>
+            </a:r>
+          </a:p>
+          <a:p>
+            <a:pPr>
+              <a:defRPr sz="1400"/>
+            </a:pPr>
+            <a:r>
+              <a:t>Стабильность без сбоев</a:t>
+            </a:r>
+          </a:p>
+          <a:p>
+            <a:pPr>
+              <a:defRPr sz="1400"/>
+            </a:pPr>
+            <a:r>
+              <a:t>Интуитивный интерфейс</a:t>
+            </a:r>
+          </a:p>
+          <a:p>
+            <a:pPr>
+              <a:defRPr sz="1400"/>
+            </a:pPr>
+            <a:r>
+              <a:t>Горизонтальное масштабирование</a:t>
+            </a:r>
+          </a:p>
+          <a:p>
+            <a:pPr>
+              <a:defRPr sz="1400"/>
+            </a:pPr>
+            <a:r>
+              <a:t>Безопасность данных (HMAC)</a:t>
+            </a:r>
+          </a:p>
+          <a:p>
+            <a:pPr>
+              <a:defRPr sz="1400"/>
+            </a:pPr>
+            <a:r>
+              <a:t>Контейнеризация (Docker)</a:t>
+            </a:r>
+          </a:p>
+          <a:p>
+            <a:pPr>
+              <a:defRPr sz="1400"/>
+            </a:pPr>
+            <a:r>
+              <a:t>Документация (VitePress)</a:t>
+            </a:r>
+          </a:p>
+        </p:txBody>
+      </p:sp>
+    </p:spTree>
+  </p:cSld>
+  <p:clrMapOvr>
+    <a:masterClrMapping/>
+  </p:clrMapOvr>
+</p:sld>
+</file>
+
+<file path=ppt/slides/slide7.xml><?xml version="1.0" encoding="utf-8"?>
+<p:sld xmlns:a="http://schemas.openxmlformats.org/drawingml/2006/main" xmlns:p="http://schemas.openxmlformats.org/presentationml/2006/main" xmlns:r="http://schemas.openxmlformats.org/officeDocument/2006/relationships">
+  <p:cSld>
+    <p:spTree>
+      <p:nvGrpSpPr>
+        <p:cNvPr id="1" name=""/>
+        <p:cNvGrpSpPr/>
+        <p:nvPr/>
+      </p:nvGrpSpPr>
+      <p:grpSpPr/>
+      <p:sp>
+        <p:nvSpPr>
+          <p:cNvPr id="2" name="Title 1"/>
+          <p:cNvSpPr>
+            <a:spLocks noGrp="1"/>
+          </p:cNvSpPr>
+          <p:nvPr>
+            <p:ph type="title"/>
+          </p:nvPr>
+        </p:nvSpPr>
+        <p:spPr/>
+        <p:txBody>
+          <a:bodyPr/>
+          <a:lstStyle/>
+          <a:p>
+            <a:r>
+              <a:t>Ключевые фичи</a:t>
+            </a:r>
+          </a:p>
+        </p:txBody>
+      </p:sp>
+      <p:sp>
+        <p:nvSpPr>
+          <p:cNvPr id="3" name="Content Placeholder 2"/>
+          <p:cNvSpPr>
+            <a:spLocks noGrp="1"/>
+          </p:cNvSpPr>
+          <p:nvPr>
+            <p:ph idx="1"/>
+          </p:nvPr>
+        </p:nvSpPr>
+        <p:spPr/>
+        <p:txBody>
+          <a:bodyPr wrap="square"/>
+          <a:lstStyle/>
+          <a:p>
+            <a:pPr>
+              <a:defRPr sz="1600"/>
+            </a:pPr>
+            <a:r>
+              <a:t>📱 Мини-приложение в MAX с авторизацией через InitData</a:t>
+            </a:r>
+          </a:p>
+          <a:p>
+            <a:pPr>
+              <a:defRPr sz="1600"/>
+            </a:pPr>
+            <a:r>
+              <a:t>🔑 QR-регистрация: админ создаёт → студент сканирует</a:t>
+            </a:r>
+          </a:p>
+          <a:p>
+            <a:pPr>
+              <a:defRPr sz="1600"/>
+            </a:pPr>
+            <a:r>
+              <a:t>📅 Каталог мероприятий с поиском и фильтрацией по типам</a:t>
+            </a:r>
+          </a:p>
+          <a:p>
+            <a:pPr>
+              <a:defRPr sz="1600"/>
+            </a:pPr>
+            <a:r>
+              <a:t>📲 QR-посещаемость: студент показывает → организатор сканирует</a:t>
+            </a:r>
+          </a:p>
+          <a:p>
+            <a:pPr>
+              <a:defRPr sz="1600"/>
+            </a:pPr>
+            <a:r>
+              <a:t>🤖 Бот: команды /start, /events + cron-уведомления</a:t>
+            </a:r>
+          </a:p>
+          <a:p>
+            <a:pPr>
+              <a:defRPr sz="1600"/>
+            </a:pPr>
+            <a:r>
+              <a:t>📊 Отчёты: посещаемость, заполняемость, статистика по типам</a:t>
+            </a:r>
+          </a:p>
+          <a:p>
+            <a:pPr>
+              <a:defRPr sz="1600"/>
+            </a:pPr>
+            <a:r>
+              <a:t>🌙 Тёмная и светлая тема с анимацией переключения</a:t>
+            </a:r>
+          </a:p>
+        </p:txBody>
+      </p:sp>
+    </p:spTree>
+  </p:cSld>
+  <p:clrMapOvr>
+    <a:masterClrMapping/>
+  </p:clrMapOvr>
+</p:sld>
+</file>
+
+<file path=ppt/slides/slide8.xml><?xml version="1.0" encoding="utf-8"?>
+<p:sld xmlns:a="http://schemas.openxmlformats.org/drawingml/2006/main" xmlns:p="http://schemas.openxmlformats.org/presentationml/2006/main" xmlns:r="http://schemas.openxmlformats.org/officeDocument/2006/relationships">
+  <p:cSld>
+    <p:spTree>
+      <p:nvGrpSpPr>
+        <p:cNvPr id="1" name=""/>
+        <p:cNvGrpSpPr/>
+        <p:nvPr/>
+      </p:nvGrpSpPr>
+      <p:grpSpPr/>
+      <p:sp>
+        <p:nvSpPr>
+          <p:cNvPr id="2" name="Title 1"/>
+          <p:cNvSpPr>
+            <a:spLocks noGrp="1"/>
+          </p:cNvSpPr>
+          <p:nvPr>
+            <p:ph type="title"/>
+          </p:nvPr>
+        </p:nvSpPr>
+        <p:spPr/>
+        <p:txBody>
+          <a:bodyPr/>
+          <a:lstStyle/>
+          <a:p>
+            <a:r>
+              <a:t>Архитектура</a:t>
+            </a:r>
+          </a:p>
+        </p:txBody>
+      </p:sp>
+      <p:sp>
+        <p:nvSpPr>
+          <p:cNvPr id="3" name="Content Placeholder 2"/>
+          <p:cNvSpPr>
+            <a:spLocks noGrp="1"/>
+          </p:cNvSpPr>
+          <p:nvPr>
+            <p:ph idx="1"/>
+          </p:nvPr>
+        </p:nvSpPr>
+        <p:spPr/>
+        <p:txBody>
+          <a:bodyPr wrap="square"/>
+          <a:lstStyle/>
+          <a:p>
+            <a:pPr>
+              <a:defRPr sz="1600"/>
+            </a:pPr>
+            <a:r>
+              <a:t>Frontend — Vue 3 + Vuetify 4 (SPA в MAX WebApp)</a:t>
+            </a:r>
+          </a:p>
+          <a:p>
+            <a:pPr>
+              <a:defRPr sz="1600"/>
+            </a:pPr>
+            <a:r>
+              <a:t>Backend — Fastify + TypeScript (REST API + Bot)</a:t>
+            </a:r>
+          </a:p>
+          <a:p>
+            <a:pPr>
+              <a:defRPr sz="1600"/>
+            </a:pPr>
+            <a:r>
+              <a:t>База данных — MariaDB + MikroORM</a:t>
+            </a:r>
+          </a:p>
+          <a:p>
+            <a:pPr>
+              <a:defRPr sz="1600"/>
+            </a:pPr>
+            <a:r>
+              <a:t>Бот — @maxhub/max-bot-api (long polling)</a:t>
+            </a:r>
+          </a:p>
+          <a:p>
+            <a:pPr>
+              <a:defRPr sz="1600"/>
+            </a:pPr>
+            <a:r>
+              <a:t>Уведомления — node-cron (планировщик)</a:t>
+            </a:r>
+          </a:p>
+          <a:p>
+            <a:pPr>
+              <a:defRPr sz="1600"/>
+            </a:pPr>
+            <a:r>
+              <a:t>Деплой — Docker + Nginx + Traefik</a:t>
+            </a:r>
+          </a:p>
+          <a:p>
+            <a:pPr>
+              <a:defRPr sz="1600"/>
+            </a:pPr>
+          </a:p>
+          <a:p>
+            <a:pPr>
+              <a:defRPr sz="1600"/>
+            </a:pPr>
+            <a:r>
+              <a:t>Масштабирование:</a:t>
+            </a:r>
+          </a:p>
+          <a:p>
+            <a:pPr lvl="1">
+              <a:defRPr sz="1600"/>
+            </a:pPr>
+            <a:r>
+              <a:t>Горизонтальное масштабирование через Docker Swarm / K8s</a:t>
+            </a:r>
+          </a:p>
+          <a:p>
+            <a:pPr lvl="1">
+              <a:defRPr sz="1600"/>
+            </a:pPr>
+            <a:r>
+              <a:t>Вынос бота в отдельный сервис при росте нагрузки</a:t>
+            </a:r>
+          </a:p>
+          <a:p>
+            <a:pPr lvl="1">
+              <a:defRPr sz="1600"/>
+            </a:pPr>
+            <a:r>
+              <a:t>Интеграция с внешними системами СКФУ (расписание, ЛК)</a:t>
+            </a:r>
+          </a:p>
+        </p:txBody>
+      </p:sp>
+    </p:spTree>
+  </p:cSld>
+  <p:clrMapOvr>
+    <a:masterClrMapping/>
+  </p:clrMapOvr>
+</p:sld>
+</file>
+
+<file path=ppt/slides/slide9.xml><?xml version="1.0" encoding="utf-8"?>
+<p:sld xmlns:a="http://schemas.openxmlformats.org/drawingml/2006/main" xmlns:p="http://schemas.openxmlformats.org/presentationml/2006/main" xmlns:r="http://schemas.openxmlformats.org/officeDocument/2006/relationships">
+  <p:cSld>
+    <p:spTree>
+      <p:nvGrpSpPr>
+        <p:cNvPr id="1" name=""/>
+        <p:cNvGrpSpPr/>
+        <p:nvPr/>
+      </p:nvGrpSpPr>
+      <p:grpSpPr/>
+      <p:sp>
+        <p:nvSpPr>
+          <p:cNvPr id="2" name="Title 1"/>
+          <p:cNvSpPr>
+            <a:spLocks noGrp="1"/>
+          </p:cNvSpPr>
+          <p:nvPr>
+            <p:ph type="title"/>
+          </p:nvPr>
+        </p:nvSpPr>
+        <p:spPr/>
+        <p:txBody>
+          <a:bodyPr/>
+          <a:lstStyle/>
+          <a:p>
+            <a:r>
+              <a:t>Технологический стек</a:t>
+            </a:r>
+          </a:p>
+        </p:txBody>
+      </p:sp>
+      <p:sp>
+        <p:nvSpPr>
+          <p:cNvPr id="3" name="Content Placeholder 2"/>
+          <p:cNvSpPr>
+            <a:spLocks noGrp="1"/>
+          </p:cNvSpPr>
+          <p:nvPr>
+            <p:ph idx="1" sz="half"/>
+          </p:nvPr>
+        </p:nvSpPr>
+        <p:spPr/>
+        <p:txBody>
+          <a:bodyPr wrap="square"/>
+          <a:lstStyle/>
+          <a:p>
+            <a:pPr>
+              <a:defRPr sz="1400"/>
+            </a:pPr>
+            <a:r>
+              <a:t>— Backend —</a:t>
+            </a:r>
+          </a:p>
+          <a:p>
+            <a:pPr>
+              <a:defRPr sz="1400"/>
+            </a:pPr>
+            <a:r>
+              <a:t>Node.js 24 + TypeScript</a:t>
+            </a:r>
+          </a:p>
+          <a:p>
+            <a:pPr>
+              <a:defRPr sz="1400"/>
+            </a:pPr>
+            <a:r>
+              <a:t>Fastify 5</a:t>
+            </a:r>
+          </a:p>
+          <a:p>
+            <a:pPr>
+              <a:defRPr sz="1400"/>
+            </a:pPr>
+            <a:r>
+              <a:t>MikroORM 7 + MariaDB</a:t>
+            </a:r>
+          </a:p>
+          <a:p>
+            <a:pPr>
+              <a:defRPr sz="1400"/>
+            </a:pPr>
+            <a:r>
+              <a:t>Zod (валидация)</a:t>
+            </a:r>
+          </a:p>
+          <a:p>
+            <a:pPr>
+              <a:defRPr sz="1400"/>
+            </a:pPr>
+            <a:r>
+              <a:t>Argon2 (хеширование)</a:t>
+            </a:r>
+          </a:p>
+          <a:p>
+            <a:pPr>
+              <a:defRPr sz="1400"/>
+            </a:pPr>
+            <a:r>
+              <a:t>@maxhub/max-bot-api</a:t>
+            </a:r>
+          </a:p>
+          <a:p>
+            <a:pPr>
+              <a:defRPr sz="1400"/>
+            </a:pPr>
+            <a:r>
+              <a:t>node-cron</a:t>
+            </a:r>
+          </a:p>
+        </p:txBody>
+      </p:sp>
+      <p:sp>
+        <p:nvSpPr>
+          <p:cNvPr id="4" name="Content Placeholder 3"/>
+          <p:cNvSpPr>
+            <a:spLocks noGrp="1"/>
+          </p:cNvSpPr>
+          <p:nvPr>
+            <p:ph idx="2" sz="half"/>
+          </p:nvPr>
+        </p:nvSpPr>
+        <p:spPr/>
+        <p:txBody>
+          <a:bodyPr wrap="square"/>
+          <a:lstStyle/>
+          <a:p>
+            <a:pPr>
+              <a:defRPr sz="1400"/>
+            </a:pPr>
+            <a:r>
+              <a:t>— Frontend —</a:t>
+            </a:r>
+          </a:p>
+          <a:p>
+            <a:pPr>
+              <a:defRPr sz="1400"/>
+            </a:pPr>
+            <a:r>
+              <a:t>Vue 3 (Composition API)</a:t>
+            </a:r>
+          </a:p>
+          <a:p>
+            <a:pPr>
+              <a:defRPr sz="1400"/>
+            </a:pPr>
+            <a:r>
+              <a:t>Vuetify 4 (Material Design)</a:t>
+            </a:r>
+          </a:p>
+          <a:p>
+            <a:pPr>
+              <a:defRPr sz="1400"/>
+            </a:pPr>
+            <a:r>
+              <a:t>Vite 8</a:t>
+            </a:r>
+          </a:p>
+          <a:p>
+            <a:pPr>
+              <a:defRPr sz="1400"/>
+            </a:pPr>
+            <a:r>
+              <a:t>Pinia 3</a:t>
+            </a:r>
+          </a:p>
+          <a:p>
+            <a:pPr>
+              <a:defRPr sz="1400"/>
+            </a:pPr>
+            <a:r>
+              <a:t>Vue Router 5 (файловый)</a:t>
+            </a:r>
+          </a:p>
+          <a:p>
+            <a:pPr>
+              <a:defRPr sz="1400"/>
+            </a:pPr>
+            <a:r>
+              <a:t>Axios + QRCode Vue3</a:t>
+            </a:r>
+          </a:p>
+        </p:txBody>
+      </p:sp>
     </p:spTree>
   </p:cSld>
   <p:clrMapOvr>
